--- a/frontend/public/downloads/CPC51-IFRS18-Felcont.pptx
+++ b/frontend/public/downloads/CPC51-IFRS18-Felcont.pptx
@@ -15418,7 +15418,7 @@
                 </a:solidFill>
                 <a:latin typeface="Segoe UI"/>
               </a:rPr>
-              <a:t>Sim — abra já. Mas não para trocar o plano de contas às cegas: o chamado levanta o roadmap do fornecedor e a parametrização de de-para (conta × categoria), sem quebrar o histórico. [Confirmar com o fornecedor]</a:t>
+              <a:t>Sim — abra já. O sistema já tem a rotina “Optante pelo IFRS” (Operações › Contabilidade Geral) com modelos Normal/PME/ITG — o chamado confirma quando as 5 categorias do CPC 51 entram nela. Atenção: a data de adoção é irreversível no sistema. [Confirmar com o fornecedor]</a:t>
             </a:r>
           </a:p>
         </p:txBody>
